--- a/outputs/presentation/storyline-overview.pptx
+++ b/outputs/presentation/storyline-overview.pptx
@@ -12458,7 +12458,7 @@
                 <a:ea typeface="Arial" pitchFamily="34" charset="-122"/>
                 <a:cs typeface="Arial" pitchFamily="34" charset="-120"/>
               </a:rPr>
-              <a:t>마이크론과 앤스로픽의 계약은 물량, 가격, 인증, 공동 로드맵을 하나로 묶은 사례입니다.</a:t>
+              <a:t>마이크론과 앤트로픽의 계약은 물량, 가격, 인증, 공동 로드맵을 하나로 묶은 사례입니다.</a:t>
             </a:r>
             <a:endParaRPr lang="en-US" sz="1875" dirty="0"/>
           </a:p>
